--- a/courses/cse3400-f2026/lecture7.pptx
+++ b/courses/cse3400-f2026/lecture7.pptx
@@ -359,7 +359,7 @@
               <a:pPr>
                 <a:defRPr/>
               </a:pPr>
-              <a:t>9/24/26</a:t>
+              <a:t>10/13/26</a:t>
             </a:fld>
             <a:endParaRPr lang="en-US"/>
           </a:p>
@@ -709,7 +709,7 @@
               <a:pPr>
                 <a:defRPr/>
               </a:pPr>
-              <a:t>9/24/26</a:t>
+              <a:t>10/13/26</a:t>
             </a:fld>
             <a:endParaRPr lang="en-US"/>
           </a:p>
@@ -2184,7 +2184,7 @@
                   <a:spcPct val="0"/>
                 </a:spcBef>
               </a:pPr>
-              <a:t>9/24/26</a:t>
+              <a:t>10/13/26</a:t>
             </a:fld>
             <a:endParaRPr lang="en-US" altLang="en-US" sz="1300"/>
           </a:p>
@@ -4203,7 +4203,7 @@
                   <a:spcPct val="0"/>
                 </a:spcBef>
               </a:pPr>
-              <a:t>9/24/26</a:t>
+              <a:t>10/13/26</a:t>
             </a:fld>
             <a:endParaRPr lang="en-US" altLang="en-US" sz="1300"/>
           </a:p>
@@ -6222,7 +6222,7 @@
                   <a:spcPct val="0"/>
                 </a:spcBef>
               </a:pPr>
-              <a:t>9/24/26</a:t>
+              <a:t>10/13/26</a:t>
             </a:fld>
             <a:endParaRPr lang="en-US" altLang="en-US" sz="1300"/>
           </a:p>
@@ -8241,7 +8241,7 @@
                   <a:spcPct val="0"/>
                 </a:spcBef>
               </a:pPr>
-              <a:t>9/24/26</a:t>
+              <a:t>10/13/26</a:t>
             </a:fld>
             <a:endParaRPr lang="en-US" altLang="en-US" sz="1300"/>
           </a:p>
@@ -10260,7 +10260,7 @@
                   <a:spcPct val="0"/>
                 </a:spcBef>
               </a:pPr>
-              <a:t>9/24/26</a:t>
+              <a:t>10/13/26</a:t>
             </a:fld>
             <a:endParaRPr lang="en-US" altLang="en-US" sz="1300"/>
           </a:p>
@@ -12279,7 +12279,7 @@
                   <a:spcPct val="0"/>
                 </a:spcBef>
               </a:pPr>
-              <a:t>9/24/26</a:t>
+              <a:t>10/13/26</a:t>
             </a:fld>
             <a:endParaRPr lang="en-US" altLang="en-US" sz="1300"/>
           </a:p>
@@ -14298,7 +14298,7 @@
                   <a:spcPct val="0"/>
                 </a:spcBef>
               </a:pPr>
-              <a:t>9/24/26</a:t>
+              <a:t>10/13/26</a:t>
             </a:fld>
             <a:endParaRPr lang="en-US" altLang="en-US" sz="1300"/>
           </a:p>
@@ -17141,7 +17141,7 @@
               <a:pPr>
                 <a:defRPr/>
               </a:pPr>
-              <a:t>9/24/26</a:t>
+              <a:t>10/13/26</a:t>
             </a:fld>
             <a:endParaRPr lang="en-US" altLang="en-US"/>
           </a:p>
@@ -17326,7 +17326,7 @@
               <a:pPr>
                 <a:defRPr/>
               </a:pPr>
-              <a:t>9/24/26</a:t>
+              <a:t>10/13/26</a:t>
             </a:fld>
             <a:endParaRPr lang="en-US" altLang="en-US"/>
           </a:p>
@@ -17568,7 +17568,7 @@
               <a:pPr>
                 <a:defRPr/>
               </a:pPr>
-              <a:t>9/24/26</a:t>
+              <a:t>10/13/26</a:t>
             </a:fld>
             <a:endParaRPr lang="en-US" altLang="en-US"/>
           </a:p>
@@ -17774,7 +17774,7 @@
               <a:pPr>
                 <a:defRPr/>
               </a:pPr>
-              <a:t>9/24/26</a:t>
+              <a:t>10/13/26</a:t>
             </a:fld>
             <a:endParaRPr lang="en-US" altLang="en-US"/>
           </a:p>
@@ -17971,7 +17971,7 @@
               <a:pPr>
                 <a:defRPr/>
               </a:pPr>
-              <a:t>9/24/26</a:t>
+              <a:t>10/13/26</a:t>
             </a:fld>
             <a:endParaRPr lang="en-US" altLang="en-US"/>
           </a:p>
@@ -18264,7 +18264,7 @@
               <a:pPr>
                 <a:defRPr/>
               </a:pPr>
-              <a:t>9/24/26</a:t>
+              <a:t>10/13/26</a:t>
             </a:fld>
             <a:endParaRPr lang="en-US" altLang="en-US"/>
           </a:p>
@@ -18696,7 +18696,7 @@
               <a:pPr>
                 <a:defRPr/>
               </a:pPr>
-              <a:t>9/24/26</a:t>
+              <a:t>10/13/26</a:t>
             </a:fld>
             <a:endParaRPr lang="en-US" altLang="en-US"/>
           </a:p>
@@ -18819,7 +18819,7 @@
               <a:pPr>
                 <a:defRPr/>
               </a:pPr>
-              <a:t>9/24/26</a:t>
+              <a:t>10/13/26</a:t>
             </a:fld>
             <a:endParaRPr lang="en-US" altLang="en-US"/>
           </a:p>
@@ -18919,7 +18919,7 @@
               <a:pPr>
                 <a:defRPr/>
               </a:pPr>
-              <a:t>9/24/26</a:t>
+              <a:t>10/13/26</a:t>
             </a:fld>
             <a:endParaRPr lang="en-US" altLang="en-US"/>
           </a:p>
@@ -19201,7 +19201,7 @@
               <a:pPr>
                 <a:defRPr/>
               </a:pPr>
-              <a:t>9/24/26</a:t>
+              <a:t>10/13/26</a:t>
             </a:fld>
             <a:endParaRPr lang="en-US" altLang="en-US"/>
           </a:p>
@@ -19460,7 +19460,7 @@
               <a:pPr>
                 <a:defRPr/>
               </a:pPr>
-              <a:t>9/24/26</a:t>
+              <a:t>10/13/26</a:t>
             </a:fld>
             <a:endParaRPr lang="en-US" altLang="en-US"/>
           </a:p>
@@ -19784,7 +19784,7 @@
               <a:pPr>
                 <a:defRPr/>
               </a:pPr>
-              <a:t>9/24/26</a:t>
+              <a:t>10/13/26</a:t>
             </a:fld>
             <a:endParaRPr lang="en-US" altLang="en-US"/>
           </a:p>
@@ -21073,7 +21073,7 @@
         <p:spPr>
           <a:xfrm>
             <a:off x="276225" y="1362833"/>
-            <a:ext cx="8591550" cy="2541338"/>
+            <a:ext cx="8591550" cy="3280001"/>
           </a:xfrm>
           <a:extLst>
             <a:ext uri="{91240B29-F687-4F45-9708-019B960494DF}">
@@ -21122,7 +21122,7 @@
             </a:r>
             <a:r>
               <a:rPr lang="en-GB" altLang="en-US" sz="2400" dirty="0"/>
-              <a:t> Strengthening </a:t>
+              <a:t> Strengthening; avoids the requirement of having the message as an integer number of blocks.</a:t>
             </a:r>
           </a:p>
           <a:p>
@@ -21347,7 +21347,7 @@
                 <a:latin typeface="Times New Roman" pitchFamily="18" charset="0"/>
                 <a:cs typeface="Times New Roman" pitchFamily="18" charset="0"/>
               </a:rPr>
-              <a:t>is the </a:t>
+              <a:t> be the </a:t>
             </a:r>
             <a:r>
               <a:rPr lang="en-GB" altLang="en-US" sz="2300" i="1" dirty="0" err="1">
@@ -21685,8 +21685,8 @@
         </p:nvSpPr>
         <p:spPr bwMode="auto">
           <a:xfrm>
-            <a:off x="372140" y="4332159"/>
-            <a:ext cx="8481348" cy="796245"/>
+            <a:off x="276225" y="5097044"/>
+            <a:ext cx="8697432" cy="796245"/>
           </a:xfrm>
           <a:prstGeom prst="rect">
             <a:avLst/>
@@ -22054,7 +22054,7 @@
                 <a:latin typeface="Tahoma" pitchFamily="34" charset="0"/>
                 <a:cs typeface="Times New Roman" pitchFamily="18" charset="0"/>
               </a:rPr>
-              <a:t>This is just a high level idea, care needed to avoid collisions</a:t>
+              <a:t>This is just a high-level idea, care is needed to avoid collisions</a:t>
             </a:r>
             <a:endParaRPr lang="en-GB" altLang="en-US" sz="2400" dirty="0">
               <a:solidFill>
@@ -27005,7 +27005,7 @@
                     <m:d>
                       <m:dPr>
                         <m:ctrlPr>
-                          <a:rPr lang="en-GB" altLang="en-US" sz="2400" i="1" dirty="0">
+                          <a:rPr lang="en-US" altLang="en-US" sz="2400" i="1" dirty="0">
                             <a:solidFill>
                               <a:srgbClr val="000000"/>
                             </a:solidFill>
@@ -27056,7 +27056,7 @@
                           <m:rPr>
                             <m:nor/>
                           </m:rPr>
-                          <a:rPr lang="en-GB" altLang="en-US" sz="2800" dirty="0"/>
+                          <a:rPr lang="en-GB" altLang="en-US" sz="2800" i="0" dirty="0"/>
                           <m:t>, … , </m:t>
                         </m:r>
                         <m:sSub>
@@ -29114,7 +29114,7 @@
           <a:p>
             <a:r>
               <a:rPr lang="en-US" sz="2000" dirty="0"/>
-              <a:t>Generally supports accumulate, </a:t>
+              <a:t>Generally, it supports accumulate, </a:t>
             </a:r>
             <a:r>
               <a:rPr lang="en-US" sz="2000" dirty="0" err="1"/>
@@ -33493,7 +33493,7 @@
                         <m:begChr m:val="{"/>
                         <m:endChr m:val="}"/>
                         <m:ctrlPr>
-                          <a:rPr lang="en-US" sz="2600" i="1" smtClean="0">
+                          <a:rPr lang="en-US" sz="2600" b="0" i="1" smtClean="0">
                             <a:latin typeface="Cambria Math" panose="02040503050406030204" pitchFamily="18" charset="0"/>
                             <a:ea typeface="Cambria Math" panose="02040503050406030204" pitchFamily="18" charset="0"/>
                           </a:rPr>
@@ -33538,7 +33538,7 @@
                         <m:sSup>
                           <m:sSupPr>
                             <m:ctrlPr>
-                              <a:rPr lang="en-US" sz="2600" i="1">
+                              <a:rPr lang="en-US" sz="2600" b="0" i="1">
                                 <a:latin typeface="Cambria Math" panose="02040503050406030204" pitchFamily="18" charset="0"/>
                                 <a:ea typeface="Cambria Math" panose="02040503050406030204" pitchFamily="18" charset="0"/>
                               </a:rPr>
@@ -34786,8 +34786,8 @@
           </a:p>
         </p:txBody>
       </p:sp>
-      <mc:AlternateContent xmlns:mc="http://schemas.openxmlformats.org/markup-compatibility/2006" xmlns:a14="http://schemas.microsoft.com/office/drawing/2010/main">
-        <mc:Choice Requires="a14">
+      <mc:AlternateContent xmlns:mc="http://schemas.openxmlformats.org/markup-compatibility/2006">
+        <mc:Choice xmlns:a14="http://schemas.microsoft.com/office/drawing/2010/main" Requires="a14">
           <p:sp>
             <p:nvSpPr>
               <p:cNvPr id="76807" name="Rectangle 15"/>
@@ -34801,7 +34801,7 @@
             <p:spPr>
               <a:xfrm>
                 <a:off x="176212" y="1397275"/>
-                <a:ext cx="8591550" cy="1609481"/>
+                <a:ext cx="8591550" cy="2440477"/>
               </a:xfrm>
               <a:extLst>
                 <a:ext uri="{91240B29-F687-4F45-9708-019B960494DF}">
@@ -34894,7 +34894,7 @@
                     <m:d>
                       <m:dPr>
                         <m:ctrlPr>
-                          <a:rPr lang="en-GB" altLang="en-US" sz="2000" i="1" dirty="0">
+                          <a:rPr lang="en-US" altLang="en-US" sz="2000" i="1" dirty="0">
                             <a:solidFill>
                               <a:srgbClr val="000000"/>
                             </a:solidFill>
@@ -34945,7 +34945,7 @@
                           <m:rPr>
                             <m:nor/>
                           </m:rPr>
-                          <a:rPr lang="en-GB" altLang="en-US" sz="2400" dirty="0"/>
+                          <a:rPr lang="en-GB" altLang="en-US" sz="2400" i="0" dirty="0"/>
                           <m:t>, … , </m:t>
                         </m:r>
                         <m:sSub>
@@ -35038,7 +35038,7 @@
                         <m:d>
                           <m:dPr>
                             <m:ctrlPr>
-                              <a:rPr lang="en-GB" altLang="en-US" sz="2000" i="1" dirty="0">
+                              <a:rPr lang="en-US" altLang="en-US" sz="2000" i="1" dirty="0">
                                 <a:solidFill>
                                   <a:srgbClr val="000000"/>
                                 </a:solidFill>
@@ -35089,7 +35089,7 @@
                               <m:rPr>
                                 <m:nor/>
                               </m:rPr>
-                              <a:rPr lang="en-GB" altLang="en-US" sz="2400" dirty="0"/>
+                              <a:rPr lang="en-GB" altLang="en-US" sz="2400" i="0" dirty="0"/>
                               <m:t>, … , </m:t>
                             </m:r>
                             <m:sSub>
@@ -35254,7 +35254,7 @@
                     <m:d>
                       <m:dPr>
                         <m:ctrlPr>
-                          <a:rPr lang="en-GB" altLang="en-US" sz="2000" i="1" dirty="0">
+                          <a:rPr lang="en-US" altLang="en-US" sz="2000" i="1" dirty="0">
                             <a:solidFill>
                               <a:srgbClr val="000000"/>
                             </a:solidFill>
@@ -35339,7 +35339,7 @@
                     <m:d>
                       <m:dPr>
                         <m:ctrlPr>
-                          <a:rPr lang="en-US" altLang="en-US" sz="2000" i="1" dirty="0" smtClean="0">
+                          <a:rPr lang="en-US" altLang="en-US" sz="2000" b="0" i="1" dirty="0" smtClean="0">
                             <a:solidFill>
                               <a:srgbClr val="000000"/>
                             </a:solidFill>
@@ -35475,6 +35475,70 @@
                 </a:pPr>
                 <a:r>
                   <a:rPr lang="en-GB" altLang="en-US" sz="2200" dirty="0"/>
+                  <a:t>Each message is a block of length </a:t>
+                </a:r>
+                <a:r>
+                  <a:rPr lang="en-GB" altLang="en-US" sz="2200" i="1" dirty="0"/>
+                  <a:t>n</a:t>
+                </a:r>
+                <a:r>
+                  <a:rPr lang="en-GB" altLang="en-US" sz="2200" dirty="0"/>
+                  <a:t> bits.</a:t>
+                </a:r>
+              </a:p>
+              <a:p>
+                <a:pPr marL="668338" lvl="1" indent="-341313" defTabSz="449263" eaLnBrk="1" hangingPunct="1">
+                  <a:spcBef>
+                    <a:spcPts val="550"/>
+                  </a:spcBef>
+                  <a:tabLst>
+                    <a:tab pos="911225" algn="l"/>
+                    <a:tab pos="1825625" algn="l"/>
+                    <a:tab pos="2740025" algn="l"/>
+                    <a:tab pos="3654425" algn="l"/>
+                    <a:tab pos="4568825" algn="l"/>
+                    <a:tab pos="5483225" algn="l"/>
+                    <a:tab pos="6397625" algn="l"/>
+                    <a:tab pos="7312025" algn="l"/>
+                    <a:tab pos="8226425" algn="l"/>
+                    <a:tab pos="9140825" algn="l"/>
+                    <a:tab pos="10055225" algn="l"/>
+                  </a:tabLst>
+                </a:pPr>
+                <a:r>
+                  <a:rPr lang="en-GB" altLang="en-US" sz="1800" dirty="0"/>
+                  <a:t>Put differently, a long message is divided into blocks each of length </a:t>
+                </a:r>
+                <a:r>
+                  <a:rPr lang="en-GB" altLang="en-US" sz="1800" i="1" dirty="0"/>
+                  <a:t>n</a:t>
+                </a:r>
+                <a:r>
+                  <a:rPr lang="en-GB" altLang="en-US" sz="1800" dirty="0"/>
+                  <a:t> bits.</a:t>
+                </a:r>
+              </a:p>
+              <a:p>
+                <a:pPr marL="341313" indent="-341313" defTabSz="449263" eaLnBrk="1" hangingPunct="1">
+                  <a:spcBef>
+                    <a:spcPts val="550"/>
+                  </a:spcBef>
+                  <a:tabLst>
+                    <a:tab pos="911225" algn="l"/>
+                    <a:tab pos="1825625" algn="l"/>
+                    <a:tab pos="2740025" algn="l"/>
+                    <a:tab pos="3654425" algn="l"/>
+                    <a:tab pos="4568825" algn="l"/>
+                    <a:tab pos="5483225" algn="l"/>
+                    <a:tab pos="6397625" algn="l"/>
+                    <a:tab pos="7312025" algn="l"/>
+                    <a:tab pos="8226425" algn="l"/>
+                    <a:tab pos="9140825" algn="l"/>
+                    <a:tab pos="10055225" algn="l"/>
+                  </a:tabLst>
+                </a:pPr>
+                <a:r>
+                  <a:rPr lang="en-GB" altLang="en-US" sz="2200" dirty="0"/>
                   <a:t>I</a:t>
                 </a:r>
                 <a14:m>
@@ -35568,7 +35632,7 @@
             </p:txBody>
           </p:sp>
         </mc:Choice>
-        <mc:Fallback xmlns="">
+        <mc:Fallback>
           <p:sp>
             <p:nvSpPr>
               <p:cNvPr id="76807" name="Rectangle 15"/>
@@ -35582,12 +35646,12 @@
             <p:spPr>
               <a:xfrm>
                 <a:off x="176212" y="1397275"/>
-                <a:ext cx="8591550" cy="1609481"/>
+                <a:ext cx="8591550" cy="2440477"/>
               </a:xfrm>
               <a:blipFill>
                 <a:blip r:embed="rId3"/>
                 <a:stretch>
-                  <a:fillRect l="-147" t="-1563" b="-4688"/>
+                  <a:fillRect l="-147" t="-1031"/>
                 </a:stretch>
               </a:blipFill>
               <a:extLst>
